--- a/Documentation/Reports and Papers/Dissertation/Figures/70-overall/components/design_workflow.pptx
+++ b/Documentation/Reports and Papers/Dissertation/Figures/70-overall/components/design_workflow.pptx
@@ -7,7 +7,7 @@
   <p:sldIdLst>
     <p:sldId id="256" r:id="rId7"/>
   </p:sldIdLst>
-  <p:sldSz cx="5940000" cy="2628000" type="screen4x3"/>
+  <p:sldSz cx="5943600" cy="4165600" type="screen4x3"/>
   <p:notesSz cx="6858000" cy="9144000"/>
   <p:defaultTextStyle>
     <a:defPPr>
@@ -3090,26 +3090,24 @@
       <p:grpSpPr/>
       <p:sp>
         <p:nvSpPr>
-          <p:cNvPr id="2" name="Rounded Rectangle 1"/>
+          <p:cNvPr id="2" name="Rectangle 1"/>
           <p:cNvSpPr/>
           <p:nvPr/>
         </p:nvSpPr>
         <p:spPr>
           <a:xfrm>
-            <a:off x="72000" y="216000"/>
-            <a:ext cx="1188000" cy="522000"/>
-          </a:xfrm>
-          <a:prstGeom prst="roundRect">
-            <a:avLst>
-              <a:gd name="adj" fmla="val 10000"/>
-            </a:avLst>
+            <a:off x="152400" y="165100"/>
+            <a:ext cx="1651000" cy="698500"/>
+          </a:xfrm>
+          <a:prstGeom prst="rect">
+            <a:avLst/>
           </a:prstGeom>
           <a:solidFill>
-            <a:srgbClr val="F2F2F2"/>
+            <a:srgbClr val="F1F5F8"/>
           </a:solidFill>
           <a:ln w="12700">
             <a:solidFill>
-              <a:srgbClr val="1F1F1F"/>
+              <a:srgbClr val="243343"/>
             </a:solidFill>
           </a:ln>
         </p:spPr>
@@ -3128,68 +3126,145 @@
           </a:fontRef>
         </p:style>
         <p:txBody>
-          <a:bodyPr rtlCol="0" anchor="ctr" wrap="square" lIns="43200" rIns="43200" tIns="21600" bIns="21600"/>
+          <a:bodyPr rtlCol="0" anchor="ctr"/>
           <a:lstStyle/>
           <a:p>
             <a:pPr algn="ctr"/>
-            <a:r>
-              <a:rPr sz="1000">
+          </a:p>
+        </p:txBody>
+      </p:sp>
+      <p:sp>
+        <p:nvSpPr>
+          <p:cNvPr id="3" name="TextBox 2"/>
+          <p:cNvSpPr txBox="1"/>
+          <p:nvPr/>
+        </p:nvSpPr>
+        <p:spPr>
+          <a:xfrm>
+            <a:off x="241300" y="258444"/>
+            <a:ext cx="1473200" cy="160654"/>
+          </a:xfrm>
+          <a:prstGeom prst="rect">
+            <a:avLst/>
+          </a:prstGeom>
+          <a:noFill/>
+        </p:spPr>
+        <p:txBody>
+          <a:bodyPr wrap="none" lIns="0" rIns="0" tIns="0" bIns="0">
+            <a:noAutofit/>
+          </a:bodyPr>
+          <a:lstStyle/>
+          <a:p>
+            <a:pPr algn="ctr">
+              <a:lnSpc>
+                <a:spcPts val="1210"/>
+              </a:lnSpc>
+              <a:spcBef>
+                <a:spcPts val="0"/>
+              </a:spcBef>
+              <a:spcAft>
+                <a:spcPts val="0"/>
+              </a:spcAft>
+            </a:pPr>
+            <a:r>
+              <a:rPr sz="1100" b="1" i="0">
                 <a:solidFill>
-                  <a:srgbClr val="1F1F1F"/>
+                  <a:srgbClr val="243343"/>
                 </a:solidFill>
                 <a:latin typeface="Arial"/>
               </a:rPr>
-              <a:t>Human torque and</a:t>
-            </a:r>
-          </a:p>
-          <a:p>
-            <a:pPr algn="ctr"/>
-            <a:r>
-              <a:rPr sz="1000">
+              <a:t>Human benchmark</a:t>
+            </a:r>
+          </a:p>
+        </p:txBody>
+      </p:sp>
+      <p:sp>
+        <p:nvSpPr>
+          <p:cNvPr id="4" name="TextBox 3"/>
+          <p:cNvSpPr txBox="1"/>
+          <p:nvPr/>
+        </p:nvSpPr>
+        <p:spPr>
+          <a:xfrm>
+            <a:off x="241300" y="475615"/>
+            <a:ext cx="1473200" cy="324104"/>
+          </a:xfrm>
+          <a:prstGeom prst="rect">
+            <a:avLst/>
+          </a:prstGeom>
+          <a:noFill/>
+        </p:spPr>
+        <p:txBody>
+          <a:bodyPr wrap="none" lIns="0" rIns="0" tIns="0" bIns="0">
+            <a:noAutofit/>
+          </a:bodyPr>
+          <a:lstStyle/>
+          <a:p>
+            <a:pPr algn="ctr">
+              <a:lnSpc>
+                <a:spcPts val="1210"/>
+              </a:lnSpc>
+              <a:spcBef>
+                <a:spcPts val="0"/>
+              </a:spcBef>
+              <a:spcAft>
+                <a:spcPts val="0"/>
+              </a:spcAft>
+            </a:pPr>
+            <a:r>
+              <a:rPr sz="1100" b="0" i="0">
                 <a:solidFill>
-                  <a:srgbClr val="1F1F1F"/>
+                  <a:srgbClr val="243343"/>
                 </a:solidFill>
                 <a:latin typeface="Arial"/>
               </a:rPr>
-              <a:t>range-of-motion targets</a:t>
-            </a:r>
-          </a:p>
-          <a:p>
-            <a:pPr algn="ctr"/>
-            <a:r>
-              <a:rPr sz="1000">
+              <a:t>Torque and range</a:t>
+            </a:r>
+          </a:p>
+          <a:p>
+            <a:pPr algn="ctr">
+              <a:lnSpc>
+                <a:spcPts val="1210"/>
+              </a:lnSpc>
+              <a:spcBef>
+                <a:spcPts val="0"/>
+              </a:spcBef>
+              <a:spcAft>
+                <a:spcPts val="0"/>
+              </a:spcAft>
+            </a:pPr>
+            <a:r>
+              <a:rPr sz="1100" b="0" i="0">
                 <a:solidFill>
-                  <a:srgbClr val="1F1F1F"/>
+                  <a:srgbClr val="243343"/>
                 </a:solidFill>
                 <a:latin typeface="Arial"/>
               </a:rPr>
-              <a:t>(OpenSim benchmark)</a:t>
-            </a:r>
-          </a:p>
-        </p:txBody>
-      </p:sp>
-      <p:sp>
-        <p:nvSpPr>
-          <p:cNvPr id="3" name="Rounded Rectangle 2"/>
+              <a:t>of motion (Ch. 2)</a:t>
+            </a:r>
+          </a:p>
+        </p:txBody>
+      </p:sp>
+      <p:sp>
+        <p:nvSpPr>
+          <p:cNvPr id="5" name="Rectangle 4"/>
           <p:cNvSpPr/>
           <p:nvPr/>
         </p:nvSpPr>
         <p:spPr>
           <a:xfrm>
-            <a:off x="1800000" y="216000"/>
-            <a:ext cx="1188000" cy="522000"/>
-          </a:xfrm>
-          <a:prstGeom prst="roundRect">
-            <a:avLst>
-              <a:gd name="adj" fmla="val 10000"/>
-            </a:avLst>
+            <a:off x="152400" y="1485900"/>
+            <a:ext cx="1651000" cy="635000"/>
+          </a:xfrm>
+          <a:prstGeom prst="rect">
+            <a:avLst/>
           </a:prstGeom>
           <a:solidFill>
-            <a:srgbClr val="F2F2F2"/>
+            <a:srgbClr val="F1F5F8"/>
           </a:solidFill>
           <a:ln w="12700">
             <a:solidFill>
-              <a:srgbClr val="1F1F1F"/>
+              <a:srgbClr val="243343"/>
             </a:solidFill>
           </a:ln>
         </p:spPr>
@@ -3208,68 +3283,145 @@
           </a:fontRef>
         </p:style>
         <p:txBody>
-          <a:bodyPr rtlCol="0" anchor="ctr" wrap="square" lIns="43200" rIns="43200" tIns="21600" bIns="21600"/>
+          <a:bodyPr rtlCol="0" anchor="ctr"/>
           <a:lstStyle/>
           <a:p>
             <a:pPr algn="ctr"/>
-            <a:r>
-              <a:rPr sz="1000">
+          </a:p>
+        </p:txBody>
+      </p:sp>
+      <p:sp>
+        <p:nvSpPr>
+          <p:cNvPr id="6" name="TextBox 5"/>
+          <p:cNvSpPr txBox="1"/>
+          <p:nvPr/>
+        </p:nvSpPr>
+        <p:spPr>
+          <a:xfrm>
+            <a:off x="241300" y="1547495"/>
+            <a:ext cx="1473200" cy="160654"/>
+          </a:xfrm>
+          <a:prstGeom prst="rect">
+            <a:avLst/>
+          </a:prstGeom>
+          <a:noFill/>
+        </p:spPr>
+        <p:txBody>
+          <a:bodyPr wrap="none" lIns="0" rIns="0" tIns="0" bIns="0">
+            <a:noAutofit/>
+          </a:bodyPr>
+          <a:lstStyle/>
+          <a:p>
+            <a:pPr algn="ctr">
+              <a:lnSpc>
+                <a:spcPts val="1210"/>
+              </a:lnSpc>
+              <a:spcBef>
+                <a:spcPts val="0"/>
+              </a:spcBef>
+              <a:spcAft>
+                <a:spcPts val="0"/>
+              </a:spcAft>
+            </a:pPr>
+            <a:r>
+              <a:rPr sz="1100" b="1" i="0">
                 <a:solidFill>
-                  <a:srgbClr val="1F1F1F"/>
+                  <a:srgbClr val="243343"/>
                 </a:solidFill>
                 <a:latin typeface="Arial"/>
               </a:rPr>
-              <a:t>Select actuator set,</a:t>
-            </a:r>
-          </a:p>
-          <a:p>
-            <a:pPr algn="ctr"/>
-            <a:r>
-              <a:rPr sz="1000">
+              <a:t>BPA force model</a:t>
+            </a:r>
+          </a:p>
+        </p:txBody>
+      </p:sp>
+      <p:sp>
+        <p:nvSpPr>
+          <p:cNvPr id="7" name="TextBox 6"/>
+          <p:cNvSpPr txBox="1"/>
+          <p:nvPr/>
+        </p:nvSpPr>
+        <p:spPr>
+          <a:xfrm>
+            <a:off x="241300" y="1764664"/>
+            <a:ext cx="1473200" cy="324104"/>
+          </a:xfrm>
+          <a:prstGeom prst="rect">
+            <a:avLst/>
+          </a:prstGeom>
+          <a:noFill/>
+        </p:spPr>
+        <p:txBody>
+          <a:bodyPr wrap="none" lIns="0" rIns="0" tIns="0" bIns="0">
+            <a:noAutofit/>
+          </a:bodyPr>
+          <a:lstStyle/>
+          <a:p>
+            <a:pPr algn="ctr">
+              <a:lnSpc>
+                <a:spcPts val="1210"/>
+              </a:lnSpc>
+              <a:spcBef>
+                <a:spcPts val="0"/>
+              </a:spcBef>
+              <a:spcAft>
+                <a:spcPts val="0"/>
+              </a:spcAft>
+            </a:pPr>
+            <a:r>
+              <a:rPr sz="1100" b="0" i="0">
                 <a:solidFill>
-                  <a:srgbClr val="1F1F1F"/>
+                  <a:srgbClr val="243343"/>
                 </a:solidFill>
                 <a:latin typeface="Arial"/>
               </a:rPr>
-              <a:t>diameter, and</a:t>
-            </a:r>
-          </a:p>
-          <a:p>
-            <a:pPr algn="ctr"/>
-            <a:r>
-              <a:rPr sz="1000">
+              <a:t>Actuator forces</a:t>
+            </a:r>
+          </a:p>
+          <a:p>
+            <a:pPr algn="ctr">
+              <a:lnSpc>
+                <a:spcPts val="1210"/>
+              </a:lnSpc>
+              <a:spcBef>
+                <a:spcPts val="0"/>
+              </a:spcBef>
+              <a:spcAft>
+                <a:spcPts val="0"/>
+              </a:spcAft>
+            </a:pPr>
+            <a:r>
+              <a:rPr sz="1100" b="0" i="0">
                 <a:solidFill>
-                  <a:srgbClr val="1F1F1F"/>
+                  <a:srgbClr val="243343"/>
                 </a:solidFill>
                 <a:latin typeface="Arial"/>
               </a:rPr>
-              <a:t>resting length</a:t>
-            </a:r>
-          </a:p>
-        </p:txBody>
-      </p:sp>
-      <p:sp>
-        <p:nvSpPr>
-          <p:cNvPr id="4" name="Rounded Rectangle 3"/>
+              <a:t>(Ch. 3)</a:t>
+            </a:r>
+          </a:p>
+        </p:txBody>
+      </p:sp>
+      <p:sp>
+        <p:nvSpPr>
+          <p:cNvPr id="8" name="Rectangle 7"/>
           <p:cNvSpPr/>
           <p:nvPr/>
         </p:nvSpPr>
         <p:spPr>
           <a:xfrm>
-            <a:off x="72000" y="1440000"/>
-            <a:ext cx="1188000" cy="432000"/>
-          </a:xfrm>
-          <a:prstGeom prst="roundRect">
-            <a:avLst>
-              <a:gd name="adj" fmla="val 10000"/>
-            </a:avLst>
+            <a:off x="2489200" y="165100"/>
+            <a:ext cx="1841500" cy="698500"/>
+          </a:xfrm>
+          <a:prstGeom prst="rect">
+            <a:avLst/>
           </a:prstGeom>
           <a:solidFill>
-            <a:srgbClr val="F2F2F2"/>
+            <a:srgbClr val="F1F5F8"/>
           </a:solidFill>
           <a:ln w="12700">
             <a:solidFill>
-              <a:srgbClr val="1F1F1F"/>
+              <a:srgbClr val="243343"/>
             </a:solidFill>
           </a:ln>
         </p:spPr>
@@ -3288,56 +3440,145 @@
           </a:fontRef>
         </p:style>
         <p:txBody>
-          <a:bodyPr rtlCol="0" anchor="ctr" wrap="square" lIns="43200" rIns="43200" tIns="21600" bIns="21600"/>
+          <a:bodyPr rtlCol="0" anchor="ctr"/>
           <a:lstStyle/>
           <a:p>
             <a:pPr algn="ctr"/>
-            <a:r>
-              <a:rPr sz="1000">
+          </a:p>
+        </p:txBody>
+      </p:sp>
+      <p:sp>
+        <p:nvSpPr>
+          <p:cNvPr id="9" name="TextBox 8"/>
+          <p:cNvSpPr txBox="1"/>
+          <p:nvPr/>
+        </p:nvSpPr>
+        <p:spPr>
+          <a:xfrm>
+            <a:off x="2578100" y="258444"/>
+            <a:ext cx="1663700" cy="160654"/>
+          </a:xfrm>
+          <a:prstGeom prst="rect">
+            <a:avLst/>
+          </a:prstGeom>
+          <a:noFill/>
+        </p:spPr>
+        <p:txBody>
+          <a:bodyPr wrap="none" lIns="0" rIns="0" tIns="0" bIns="0">
+            <a:noAutofit/>
+          </a:bodyPr>
+          <a:lstStyle/>
+          <a:p>
+            <a:pPr algn="ctr">
+              <a:lnSpc>
+                <a:spcPts val="1210"/>
+              </a:lnSpc>
+              <a:spcBef>
+                <a:spcPts val="0"/>
+              </a:spcBef>
+              <a:spcAft>
+                <a:spcPts val="0"/>
+              </a:spcAft>
+            </a:pPr>
+            <a:r>
+              <a:rPr sz="1100" b="1" i="0">
                 <a:solidFill>
-                  <a:srgbClr val="1F1F1F"/>
+                  <a:srgbClr val="243343"/>
                 </a:solidFill>
                 <a:latin typeface="Arial"/>
               </a:rPr>
-              <a:t>BPA force model</a:t>
-            </a:r>
-          </a:p>
-          <a:p>
-            <a:pPr algn="ctr"/>
-            <a:r>
-              <a:rPr sz="1000">
+              <a:t>Select actuators</a:t>
+            </a:r>
+          </a:p>
+        </p:txBody>
+      </p:sp>
+      <p:sp>
+        <p:nvSpPr>
+          <p:cNvPr id="10" name="TextBox 9"/>
+          <p:cNvSpPr txBox="1"/>
+          <p:nvPr/>
+        </p:nvSpPr>
+        <p:spPr>
+          <a:xfrm>
+            <a:off x="2578100" y="475615"/>
+            <a:ext cx="1663700" cy="324104"/>
+          </a:xfrm>
+          <a:prstGeom prst="rect">
+            <a:avLst/>
+          </a:prstGeom>
+          <a:noFill/>
+        </p:spPr>
+        <p:txBody>
+          <a:bodyPr wrap="none" lIns="0" rIns="0" tIns="0" bIns="0">
+            <a:noAutofit/>
+          </a:bodyPr>
+          <a:lstStyle/>
+          <a:p>
+            <a:pPr algn="ctr">
+              <a:lnSpc>
+                <a:spcPts val="1210"/>
+              </a:lnSpc>
+              <a:spcBef>
+                <a:spcPts val="0"/>
+              </a:spcBef>
+              <a:spcAft>
+                <a:spcPts val="0"/>
+              </a:spcAft>
+            </a:pPr>
+            <a:r>
+              <a:rPr sz="1100" b="0" i="0">
                 <a:solidFill>
-                  <a:srgbClr val="1F1F1F"/>
+                  <a:srgbClr val="243343"/>
                 </a:solidFill>
                 <a:latin typeface="Arial"/>
               </a:rPr>
-              <a:t>(Ch. 3)</a:t>
-            </a:r>
-          </a:p>
-        </p:txBody>
-      </p:sp>
-      <p:sp>
-        <p:nvSpPr>
-          <p:cNvPr id="5" name="Rounded Rectangle 4"/>
+              <a:t>Diameter, resting length,</a:t>
+            </a:r>
+          </a:p>
+          <a:p>
+            <a:pPr algn="ctr">
+              <a:lnSpc>
+                <a:spcPts val="1210"/>
+              </a:lnSpc>
+              <a:spcBef>
+                <a:spcPts val="0"/>
+              </a:spcBef>
+              <a:spcAft>
+                <a:spcPts val="0"/>
+              </a:spcAft>
+            </a:pPr>
+            <a:r>
+              <a:rPr sz="1100" b="0" i="0">
+                <a:solidFill>
+                  <a:srgbClr val="243343"/>
+                </a:solidFill>
+                <a:latin typeface="Arial"/>
+              </a:rPr>
+              <a:t>and actuator count</a:t>
+            </a:r>
+          </a:p>
+        </p:txBody>
+      </p:sp>
+      <p:sp>
+        <p:nvSpPr>
+          <p:cNvPr id="11" name="Rectangle 10"/>
           <p:cNvSpPr/>
           <p:nvPr/>
         </p:nvSpPr>
         <p:spPr>
           <a:xfrm>
-            <a:off x="1800000" y="1440000"/>
-            <a:ext cx="1188000" cy="522000"/>
-          </a:xfrm>
-          <a:prstGeom prst="roundRect">
-            <a:avLst>
-              <a:gd name="adj" fmla="val 10000"/>
-            </a:avLst>
+            <a:off x="2489200" y="1485900"/>
+            <a:ext cx="1841500" cy="698500"/>
+          </a:xfrm>
+          <a:prstGeom prst="rect">
+            <a:avLst/>
           </a:prstGeom>
           <a:solidFill>
-            <a:srgbClr val="F2F2F2"/>
+            <a:srgbClr val="F1F5F8"/>
           </a:solidFill>
           <a:ln w="12700">
             <a:solidFill>
-              <a:srgbClr val="1F1F1F"/>
+              <a:srgbClr val="243343"/>
             </a:solidFill>
           </a:ln>
         </p:spPr>
@@ -3356,38 +3597,117 @@
           </a:fontRef>
         </p:style>
         <p:txBody>
-          <a:bodyPr rtlCol="0" anchor="ctr" wrap="square" lIns="43200" rIns="43200" tIns="21600" bIns="21600"/>
+          <a:bodyPr rtlCol="0" anchor="ctr"/>
           <a:lstStyle/>
           <a:p>
             <a:pPr algn="ctr"/>
-            <a:r>
-              <a:rPr sz="1000">
+          </a:p>
+        </p:txBody>
+      </p:sp>
+      <p:sp>
+        <p:nvSpPr>
+          <p:cNvPr id="12" name="TextBox 11"/>
+          <p:cNvSpPr txBox="1"/>
+          <p:nvPr/>
+        </p:nvSpPr>
+        <p:spPr>
+          <a:xfrm>
+            <a:off x="2578100" y="1579245"/>
+            <a:ext cx="1663700" cy="160654"/>
+          </a:xfrm>
+          <a:prstGeom prst="rect">
+            <a:avLst/>
+          </a:prstGeom>
+          <a:noFill/>
+        </p:spPr>
+        <p:txBody>
+          <a:bodyPr wrap="none" lIns="0" rIns="0" tIns="0" bIns="0">
+            <a:noAutofit/>
+          </a:bodyPr>
+          <a:lstStyle/>
+          <a:p>
+            <a:pPr algn="ctr">
+              <a:lnSpc>
+                <a:spcPts val="1210"/>
+              </a:lnSpc>
+              <a:spcBef>
+                <a:spcPts val="0"/>
+              </a:spcBef>
+              <a:spcAft>
+                <a:spcPts val="0"/>
+              </a:spcAft>
+            </a:pPr>
+            <a:r>
+              <a:rPr sz="1100" b="1" i="0">
                 <a:solidFill>
-                  <a:srgbClr val="1F1F1F"/>
+                  <a:srgbClr val="243343"/>
                 </a:solidFill>
                 <a:latin typeface="Arial"/>
               </a:rPr>
-              <a:t>Design routes under the</a:t>
-            </a:r>
-          </a:p>
-          <a:p>
-            <a:pPr algn="ctr"/>
-            <a:r>
-              <a:rPr sz="1000">
+              <a:t>Design routes</a:t>
+            </a:r>
+          </a:p>
+        </p:txBody>
+      </p:sp>
+      <p:sp>
+        <p:nvSpPr>
+          <p:cNvPr id="13" name="TextBox 12"/>
+          <p:cNvSpPr txBox="1"/>
+          <p:nvPr/>
+        </p:nvSpPr>
+        <p:spPr>
+          <a:xfrm>
+            <a:off x="2578100" y="1796414"/>
+            <a:ext cx="1663700" cy="324104"/>
+          </a:xfrm>
+          <a:prstGeom prst="rect">
+            <a:avLst/>
+          </a:prstGeom>
+          <a:noFill/>
+        </p:spPr>
+        <p:txBody>
+          <a:bodyPr wrap="none" lIns="0" rIns="0" tIns="0" bIns="0">
+            <a:noAutofit/>
+          </a:bodyPr>
+          <a:lstStyle/>
+          <a:p>
+            <a:pPr algn="ctr">
+              <a:lnSpc>
+                <a:spcPts val="1210"/>
+              </a:lnSpc>
+              <a:spcBef>
+                <a:spcPts val="0"/>
+              </a:spcBef>
+              <a:spcAft>
+                <a:spcPts val="0"/>
+              </a:spcAft>
+            </a:pPr>
+            <a:r>
+              <a:rPr sz="1100" b="0" i="0">
                 <a:solidFill>
-                  <a:srgbClr val="1F1F1F"/>
+                  <a:srgbClr val="243343"/>
                 </a:solidFill>
                 <a:latin typeface="Arial"/>
               </a:rPr>
-              <a:t>corrected torque model</a:t>
-            </a:r>
-          </a:p>
-          <a:p>
-            <a:pPr algn="ctr"/>
-            <a:r>
-              <a:rPr sz="1000">
+              <a:t>Corrected torque model</a:t>
+            </a:r>
+          </a:p>
+          <a:p>
+            <a:pPr algn="ctr">
+              <a:lnSpc>
+                <a:spcPts val="1210"/>
+              </a:lnSpc>
+              <a:spcBef>
+                <a:spcPts val="0"/>
+              </a:spcBef>
+              <a:spcAft>
+                <a:spcPts val="0"/>
+              </a:spcAft>
+            </a:pPr>
+            <a:r>
+              <a:rPr sz="1100" b="0" i="0">
                 <a:solidFill>
-                  <a:srgbClr val="1F1F1F"/>
+                  <a:srgbClr val="243343"/>
                 </a:solidFill>
                 <a:latin typeface="Arial"/>
               </a:rPr>
@@ -3396,583 +3716,25 @@
           </a:p>
         </p:txBody>
       </p:sp>
-      <p:sp>
-        <p:nvSpPr>
-          <p:cNvPr id="6" name="Diamond 5"/>
-          <p:cNvSpPr/>
-          <p:nvPr/>
-        </p:nvSpPr>
-        <p:spPr>
-          <a:xfrm>
-            <a:off x="3384000" y="1386000"/>
-            <a:ext cx="1116000" cy="630000"/>
-          </a:xfrm>
-          <a:prstGeom prst="diamond">
-            <a:avLst/>
-          </a:prstGeom>
-          <a:solidFill>
-            <a:srgbClr val="F2F2F2"/>
-          </a:solidFill>
-          <a:ln w="12700">
-            <a:solidFill>
-              <a:srgbClr val="1F1F1F"/>
-            </a:solidFill>
-          </a:ln>
-        </p:spPr>
-        <p:style>
-          <a:lnRef idx="1">
-            <a:schemeClr val="accent1"/>
-          </a:lnRef>
-          <a:fillRef idx="3">
-            <a:schemeClr val="accent1"/>
-          </a:fillRef>
-          <a:effectRef idx="2">
-            <a:schemeClr val="accent1"/>
-          </a:effectRef>
-          <a:fontRef idx="minor">
-            <a:schemeClr val="lt1"/>
-          </a:fontRef>
-        </p:style>
-        <p:txBody>
-          <a:bodyPr rtlCol="0" anchor="ctr" wrap="square"/>
-          <a:lstStyle/>
-          <a:p>
-            <a:pPr algn="ctr"/>
-            <a:r>
-              <a:rPr sz="1000">
-                <a:solidFill>
-                  <a:srgbClr val="1F1F1F"/>
-                </a:solidFill>
-                <a:latin typeface="Arial"/>
-              </a:rPr>
-              <a:t>Meets
-targets?</a:t>
-            </a:r>
-          </a:p>
-        </p:txBody>
-      </p:sp>
-      <p:sp>
-        <p:nvSpPr>
-          <p:cNvPr id="7" name="Rounded Rectangle 6"/>
-          <p:cNvSpPr/>
-          <p:nvPr/>
-        </p:nvSpPr>
-        <p:spPr>
-          <a:xfrm>
-            <a:off x="4752000" y="1440000"/>
-            <a:ext cx="1080000" cy="432000"/>
-          </a:xfrm>
-          <a:prstGeom prst="roundRect">
-            <a:avLst>
-              <a:gd name="adj" fmla="val 10000"/>
-            </a:avLst>
-          </a:prstGeom>
-          <a:solidFill>
-            <a:srgbClr val="F2F2F2"/>
-          </a:solidFill>
-          <a:ln w="12700">
-            <a:solidFill>
-              <a:srgbClr val="1F1F1F"/>
-            </a:solidFill>
-          </a:ln>
-        </p:spPr>
-        <p:style>
-          <a:lnRef idx="1">
-            <a:schemeClr val="accent1"/>
-          </a:lnRef>
-          <a:fillRef idx="3">
-            <a:schemeClr val="accent1"/>
-          </a:fillRef>
-          <a:effectRef idx="2">
-            <a:schemeClr val="accent1"/>
-          </a:effectRef>
-          <a:fontRef idx="minor">
-            <a:schemeClr val="lt1"/>
-          </a:fontRef>
-        </p:style>
-        <p:txBody>
-          <a:bodyPr rtlCol="0" anchor="ctr" wrap="square" lIns="43200" rIns="43200" tIns="21600" bIns="21600"/>
-          <a:lstStyle/>
-          <a:p>
-            <a:pPr algn="ctr"/>
-            <a:r>
-              <a:rPr sz="1000">
-                <a:solidFill>
-                  <a:srgbClr val="1F1F1F"/>
-                </a:solidFill>
-                <a:latin typeface="Arial"/>
-              </a:rPr>
-              <a:t>Commit to</a:t>
-            </a:r>
-          </a:p>
-          <a:p>
-            <a:pPr algn="ctr"/>
-            <a:r>
-              <a:rPr sz="1000">
-                <a:solidFill>
-                  <a:srgbClr val="1F1F1F"/>
-                </a:solidFill>
-                <a:latin typeface="Arial"/>
-              </a:rPr>
-              <a:t>hardware</a:t>
-            </a:r>
-          </a:p>
-        </p:txBody>
-      </p:sp>
-      <p:sp>
-        <p:nvSpPr>
-          <p:cNvPr id="8" name="Rounded Rectangle 7"/>
-          <p:cNvSpPr/>
-          <p:nvPr/>
-        </p:nvSpPr>
-        <p:spPr>
-          <a:xfrm>
-            <a:off x="4031999" y="2160000"/>
-            <a:ext cx="1655999" cy="396000"/>
-          </a:xfrm>
-          <a:prstGeom prst="roundRect">
-            <a:avLst>
-              <a:gd name="adj" fmla="val 10000"/>
-            </a:avLst>
-          </a:prstGeom>
-          <a:solidFill>
-            <a:srgbClr val="F2F2F2"/>
-          </a:solidFill>
-          <a:ln w="12700">
-            <a:solidFill>
-              <a:srgbClr val="1F1F1F"/>
-            </a:solidFill>
-            <a:prstDash val="dash"/>
-          </a:ln>
-        </p:spPr>
-        <p:style>
-          <a:lnRef idx="1">
-            <a:schemeClr val="accent1"/>
-          </a:lnRef>
-          <a:fillRef idx="3">
-            <a:schemeClr val="accent1"/>
-          </a:fillRef>
-          <a:effectRef idx="2">
-            <a:schemeClr val="accent1"/>
-          </a:effectRef>
-          <a:fontRef idx="minor">
-            <a:schemeClr val="lt1"/>
-          </a:fontRef>
-        </p:style>
-        <p:txBody>
-          <a:bodyPr rtlCol="0" anchor="ctr" wrap="square" lIns="43200" rIns="43200" tIns="21600" bIns="21600"/>
-          <a:lstStyle/>
-          <a:p>
-            <a:pPr algn="ctr"/>
-            <a:r>
-              <a:rPr sz="1000">
-                <a:solidFill>
-                  <a:srgbClr val="1F1F1F"/>
-                </a:solidFill>
-                <a:latin typeface="Arial"/>
-              </a:rPr>
-              <a:t>Verify in closed-loop</a:t>
-            </a:r>
-          </a:p>
-          <a:p>
-            <a:pPr algn="ctr"/>
-            <a:r>
-              <a:rPr sz="1000">
-                <a:solidFill>
-                  <a:srgbClr val="1F1F1F"/>
-                </a:solidFill>
-                <a:latin typeface="Arial"/>
-              </a:rPr>
-              <a:t>simulation (Ch. 6)</a:t>
-            </a:r>
-          </a:p>
-        </p:txBody>
-      </p:sp>
       <p:cxnSp>
         <p:nvCxnSpPr>
-          <p:cNvPr id="9" name="Connector 8"/>
+          <p:cNvPr id="14" name="Connector 13"/>
           <p:cNvCxnSpPr/>
           <p:nvPr/>
         </p:nvCxnSpPr>
         <p:spPr>
           <a:xfrm>
-            <a:off x="1278000" y="475200"/>
-            <a:ext cx="504000" cy="0"/>
+            <a:off x="1803400" y="508000"/>
+            <a:ext cx="685800" cy="0"/>
           </a:xfrm>
           <a:prstGeom prst="line">
             <a:avLst/>
           </a:prstGeom>
           <a:ln w="12700">
             <a:solidFill>
-              <a:srgbClr val="1F1F1F"/>
+              <a:srgbClr val="243343"/>
             </a:solidFill>
-            <a:tailEnd type="triangle" w="med" len="med"/>
-          </a:ln>
-        </p:spPr>
-        <p:style>
-          <a:lnRef idx="2">
-            <a:schemeClr val="accent1"/>
-          </a:lnRef>
-          <a:fillRef idx="0">
-            <a:schemeClr val="accent1"/>
-          </a:fillRef>
-          <a:effectRef idx="1">
-            <a:schemeClr val="accent1"/>
-          </a:effectRef>
-          <a:fontRef idx="minor">
-            <a:schemeClr val="tx1"/>
-          </a:fontRef>
-        </p:style>
-      </p:cxnSp>
-      <p:sp>
-        <p:nvSpPr>
-          <p:cNvPr id="10" name="TextBox 9"/>
-          <p:cNvSpPr txBox="1"/>
-          <p:nvPr/>
-        </p:nvSpPr>
-        <p:spPr>
-          <a:xfrm>
-            <a:off x="1278000" y="251999"/>
-            <a:ext cx="503999" cy="270000"/>
-          </a:xfrm>
-          <a:prstGeom prst="rect">
-            <a:avLst/>
-          </a:prstGeom>
-          <a:noFill/>
-        </p:spPr>
-        <p:txBody>
-          <a:bodyPr wrap="square" lIns="10800" rIns="10800" tIns="3600" bIns="3600">
-            <a:spAutoFit/>
-          </a:bodyPr>
-          <a:lstStyle/>
-          <a:p>
-            <a:pPr algn="ctr"/>
-            <a:r>
-              <a:rPr sz="1000" b="0">
-                <a:solidFill>
-                  <a:srgbClr val="1F1F1F"/>
-                </a:solidFill>
-                <a:latin typeface="Arial"/>
-              </a:rPr>
-              <a:t>targets</a:t>
-            </a:r>
-          </a:p>
-        </p:txBody>
-      </p:sp>
-      <p:cxnSp>
-        <p:nvCxnSpPr>
-          <p:cNvPr id="11" name="Connector 10"/>
-          <p:cNvCxnSpPr/>
-          <p:nvPr/>
-        </p:nvCxnSpPr>
-        <p:spPr>
-          <a:xfrm>
-            <a:off x="1278000" y="1655999"/>
-            <a:ext cx="504000" cy="0"/>
-          </a:xfrm>
-          <a:prstGeom prst="line">
-            <a:avLst/>
-          </a:prstGeom>
-          <a:ln w="12700">
-            <a:solidFill>
-              <a:srgbClr val="1F1F1F"/>
-            </a:solidFill>
-            <a:tailEnd type="triangle" w="med" len="med"/>
-          </a:ln>
-        </p:spPr>
-        <p:style>
-          <a:lnRef idx="2">
-            <a:schemeClr val="accent1"/>
-          </a:lnRef>
-          <a:fillRef idx="0">
-            <a:schemeClr val="accent1"/>
-          </a:fillRef>
-          <a:effectRef idx="1">
-            <a:schemeClr val="accent1"/>
-          </a:effectRef>
-          <a:fontRef idx="minor">
-            <a:schemeClr val="tx1"/>
-          </a:fontRef>
-        </p:style>
-      </p:cxnSp>
-      <p:sp>
-        <p:nvSpPr>
-          <p:cNvPr id="12" name="TextBox 11"/>
-          <p:cNvSpPr txBox="1"/>
-          <p:nvPr/>
-        </p:nvSpPr>
-        <p:spPr>
-          <a:xfrm>
-            <a:off x="1278000" y="1782000"/>
-            <a:ext cx="503999" cy="270000"/>
-          </a:xfrm>
-          <a:prstGeom prst="rect">
-            <a:avLst/>
-          </a:prstGeom>
-          <a:noFill/>
-        </p:spPr>
-        <p:txBody>
-          <a:bodyPr wrap="square" lIns="10800" rIns="10800" tIns="3600" bIns="3600">
-            <a:spAutoFit/>
-          </a:bodyPr>
-          <a:lstStyle/>
-          <a:p>
-            <a:pPr algn="ctr"/>
-            <a:r>
-              <a:rPr sz="1000" b="0">
-                <a:solidFill>
-                  <a:srgbClr val="1F1F1F"/>
-                </a:solidFill>
-                <a:latin typeface="Arial"/>
-              </a:rPr>
-              <a:t>force surface</a:t>
-            </a:r>
-          </a:p>
-        </p:txBody>
-      </p:sp>
-      <p:cxnSp>
-        <p:nvCxnSpPr>
-          <p:cNvPr id="13" name="Connector 12"/>
-          <p:cNvCxnSpPr/>
-          <p:nvPr/>
-        </p:nvCxnSpPr>
-        <p:spPr>
-          <a:xfrm>
-            <a:off x="2394000" y="756000"/>
-            <a:ext cx="0" cy="666000"/>
-          </a:xfrm>
-          <a:prstGeom prst="line">
-            <a:avLst/>
-          </a:prstGeom>
-          <a:ln w="12700">
-            <a:solidFill>
-              <a:srgbClr val="1F1F1F"/>
-            </a:solidFill>
-            <a:tailEnd type="triangle" w="med" len="med"/>
-          </a:ln>
-        </p:spPr>
-        <p:style>
-          <a:lnRef idx="2">
-            <a:schemeClr val="accent1"/>
-          </a:lnRef>
-          <a:fillRef idx="0">
-            <a:schemeClr val="accent1"/>
-          </a:fillRef>
-          <a:effectRef idx="1">
-            <a:schemeClr val="accent1"/>
-          </a:effectRef>
-          <a:fontRef idx="minor">
-            <a:schemeClr val="tx1"/>
-          </a:fontRef>
-        </p:style>
-      </p:cxnSp>
-      <p:sp>
-        <p:nvSpPr>
-          <p:cNvPr id="14" name="TextBox 13"/>
-          <p:cNvSpPr txBox="1"/>
-          <p:nvPr/>
-        </p:nvSpPr>
-        <p:spPr>
-          <a:xfrm>
-            <a:off x="2466000" y="972000"/>
-            <a:ext cx="864000" cy="270000"/>
-          </a:xfrm>
-          <a:prstGeom prst="rect">
-            <a:avLst/>
-          </a:prstGeom>
-          <a:noFill/>
-        </p:spPr>
-        <p:txBody>
-          <a:bodyPr wrap="square" lIns="10800" rIns="10800" tIns="3600" bIns="3600">
-            <a:spAutoFit/>
-          </a:bodyPr>
-          <a:lstStyle/>
-          <a:p>
-            <a:pPr algn="l"/>
-            <a:r>
-              <a:rPr sz="1000" b="0">
-                <a:solidFill>
-                  <a:srgbClr val="1F1F1F"/>
-                </a:solidFill>
-                <a:latin typeface="Arial"/>
-              </a:rPr>
-              <a:t>actuator set</a:t>
-            </a:r>
-          </a:p>
-        </p:txBody>
-      </p:sp>
-      <p:cxnSp>
-        <p:nvCxnSpPr>
-          <p:cNvPr id="15" name="Connector 14"/>
-          <p:cNvCxnSpPr/>
-          <p:nvPr/>
-        </p:nvCxnSpPr>
-        <p:spPr>
-          <a:xfrm>
-            <a:off x="3006000" y="1699200"/>
-            <a:ext cx="360000" cy="0"/>
-          </a:xfrm>
-          <a:prstGeom prst="line">
-            <a:avLst/>
-          </a:prstGeom>
-          <a:ln w="12700">
-            <a:solidFill>
-              <a:srgbClr val="1F1F1F"/>
-            </a:solidFill>
-            <a:tailEnd type="triangle" w="med" len="med"/>
-          </a:ln>
-        </p:spPr>
-        <p:style>
-          <a:lnRef idx="2">
-            <a:schemeClr val="accent1"/>
-          </a:lnRef>
-          <a:fillRef idx="0">
-            <a:schemeClr val="accent1"/>
-          </a:fillRef>
-          <a:effectRef idx="1">
-            <a:schemeClr val="accent1"/>
-          </a:effectRef>
-          <a:fontRef idx="minor">
-            <a:schemeClr val="tx1"/>
-          </a:fontRef>
-        </p:style>
-      </p:cxnSp>
-      <p:sp>
-        <p:nvSpPr>
-          <p:cNvPr id="16" name="TextBox 15"/>
-          <p:cNvSpPr txBox="1"/>
-          <p:nvPr/>
-        </p:nvSpPr>
-        <p:spPr>
-          <a:xfrm>
-            <a:off x="2628000" y="1188000"/>
-            <a:ext cx="1584000" cy="270000"/>
-          </a:xfrm>
-          <a:prstGeom prst="rect">
-            <a:avLst/>
-          </a:prstGeom>
-          <a:noFill/>
-        </p:spPr>
-        <p:txBody>
-          <a:bodyPr wrap="square" lIns="10800" rIns="10800" tIns="3600" bIns="3600">
-            <a:spAutoFit/>
-          </a:bodyPr>
-          <a:lstStyle/>
-          <a:p>
-            <a:pPr algn="ctr"/>
-            <a:r>
-              <a:rPr sz="1000" b="0">
-                <a:solidFill>
-                  <a:srgbClr val="1F1F1F"/>
-                </a:solidFill>
-                <a:latin typeface="Arial"/>
-              </a:rPr>
-              <a:t>predicted torque and</a:t>
-            </a:r>
-          </a:p>
-          <a:p>
-            <a:pPr algn="ctr"/>
-            <a:r>
-              <a:rPr sz="1000" b="0">
-                <a:solidFill>
-                  <a:srgbClr val="1F1F1F"/>
-                </a:solidFill>
-                <a:latin typeface="Arial"/>
-              </a:rPr>
-              <a:t>range of motion</a:t>
-            </a:r>
-          </a:p>
-        </p:txBody>
-      </p:sp>
-      <p:cxnSp>
-        <p:nvCxnSpPr>
-          <p:cNvPr id="17" name="Connector 16"/>
-          <p:cNvCxnSpPr/>
-          <p:nvPr/>
-        </p:nvCxnSpPr>
-        <p:spPr>
-          <a:xfrm>
-            <a:off x="4518000" y="1699200"/>
-            <a:ext cx="216000" cy="0"/>
-          </a:xfrm>
-          <a:prstGeom prst="line">
-            <a:avLst/>
-          </a:prstGeom>
-          <a:ln w="12700">
-            <a:solidFill>
-              <a:srgbClr val="1F1F1F"/>
-            </a:solidFill>
-            <a:tailEnd type="triangle" w="med" len="med"/>
-          </a:ln>
-        </p:spPr>
-        <p:style>
-          <a:lnRef idx="2">
-            <a:schemeClr val="accent1"/>
-          </a:lnRef>
-          <a:fillRef idx="0">
-            <a:schemeClr val="accent1"/>
-          </a:fillRef>
-          <a:effectRef idx="1">
-            <a:schemeClr val="accent1"/>
-          </a:effectRef>
-          <a:fontRef idx="minor">
-            <a:schemeClr val="tx1"/>
-          </a:fontRef>
-        </p:style>
-      </p:cxnSp>
-      <p:sp>
-        <p:nvSpPr>
-          <p:cNvPr id="18" name="TextBox 17"/>
-          <p:cNvSpPr txBox="1"/>
-          <p:nvPr/>
-        </p:nvSpPr>
-        <p:spPr>
-          <a:xfrm>
-            <a:off x="4446000" y="1494000"/>
-            <a:ext cx="324000" cy="270000"/>
-          </a:xfrm>
-          <a:prstGeom prst="rect">
-            <a:avLst/>
-          </a:prstGeom>
-          <a:noFill/>
-        </p:spPr>
-        <p:txBody>
-          <a:bodyPr wrap="square" lIns="10800" rIns="10800" tIns="3600" bIns="3600">
-            <a:spAutoFit/>
-          </a:bodyPr>
-          <a:lstStyle/>
-          <a:p>
-            <a:pPr algn="ctr"/>
-            <a:r>
-              <a:rPr sz="1000" b="0">
-                <a:solidFill>
-                  <a:srgbClr val="1F1F1F"/>
-                </a:solidFill>
-                <a:latin typeface="Arial"/>
-              </a:rPr>
-              <a:t>yes</a:t>
-            </a:r>
-          </a:p>
-        </p:txBody>
-      </p:sp>
-      <p:cxnSp>
-        <p:nvCxnSpPr>
-          <p:cNvPr id="19" name="Connector 18"/>
-          <p:cNvCxnSpPr/>
-          <p:nvPr/>
-        </p:nvCxnSpPr>
-        <p:spPr>
-          <a:xfrm>
-            <a:off x="3941999" y="2023200"/>
-            <a:ext cx="0" cy="262800"/>
-          </a:xfrm>
-          <a:prstGeom prst="line">
-            <a:avLst/>
-          </a:prstGeom>
-          <a:ln w="12700">
-            <a:solidFill>
-              <a:srgbClr val="1F1F1F"/>
-            </a:solidFill>
+            <a:tailEnd type="triangle" w="sm" len="sm"/>
           </a:ln>
         </p:spPr>
         <p:style>
@@ -3992,23 +3754,23 @@
       </p:cxnSp>
       <p:cxnSp>
         <p:nvCxnSpPr>
-          <p:cNvPr id="20" name="Connector 19"/>
+          <p:cNvPr id="15" name="Connector 14"/>
           <p:cNvCxnSpPr/>
           <p:nvPr/>
         </p:nvCxnSpPr>
         <p:spPr>
           <a:xfrm>
-            <a:off x="3941999" y="2286000"/>
-            <a:ext cx="72001" cy="0"/>
+            <a:off x="3409950" y="863600"/>
+            <a:ext cx="0" cy="622300"/>
           </a:xfrm>
           <a:prstGeom prst="line">
             <a:avLst/>
           </a:prstGeom>
           <a:ln w="12700">
             <a:solidFill>
-              <a:srgbClr val="1F1F1F"/>
+              <a:srgbClr val="243343"/>
             </a:solidFill>
-            <a:tailEnd type="triangle" w="med" len="med"/>
+            <a:tailEnd type="triangle" w="sm" len="sm"/>
           </a:ln>
         </p:spPr>
         <p:style>
@@ -4028,21 +3790,533 @@
       </p:cxnSp>
       <p:cxnSp>
         <p:nvCxnSpPr>
-          <p:cNvPr id="21" name="Connector 20"/>
+          <p:cNvPr id="16" name="Connector 15"/>
           <p:cNvCxnSpPr/>
           <p:nvPr/>
         </p:nvCxnSpPr>
         <p:spPr>
-          <a:xfrm flipH="1">
-            <a:off x="2394000" y="2023200"/>
-            <a:ext cx="1547999" cy="0"/>
+          <a:xfrm>
+            <a:off x="1803400" y="1765300"/>
+            <a:ext cx="685800" cy="0"/>
           </a:xfrm>
           <a:prstGeom prst="line">
             <a:avLst/>
           </a:prstGeom>
           <a:ln w="12700">
             <a:solidFill>
-              <a:srgbClr val="1F1F1F"/>
+              <a:srgbClr val="243343"/>
+            </a:solidFill>
+            <a:tailEnd type="triangle" w="sm" len="sm"/>
+          </a:ln>
+        </p:spPr>
+        <p:style>
+          <a:lnRef idx="2">
+            <a:schemeClr val="accent1"/>
+          </a:lnRef>
+          <a:fillRef idx="0">
+            <a:schemeClr val="accent1"/>
+          </a:fillRef>
+          <a:effectRef idx="1">
+            <a:schemeClr val="accent1"/>
+          </a:effectRef>
+          <a:fontRef idx="minor">
+            <a:schemeClr val="tx1"/>
+          </a:fontRef>
+        </p:style>
+      </p:cxnSp>
+      <p:sp>
+        <p:nvSpPr>
+          <p:cNvPr id="17" name="TextBox 16"/>
+          <p:cNvSpPr txBox="1"/>
+          <p:nvPr/>
+        </p:nvSpPr>
+        <p:spPr>
+          <a:xfrm>
+            <a:off x="1816100" y="228600"/>
+            <a:ext cx="635000" cy="355600"/>
+          </a:xfrm>
+          <a:prstGeom prst="rect">
+            <a:avLst/>
+          </a:prstGeom>
+          <a:noFill/>
+        </p:spPr>
+        <p:txBody>
+          <a:bodyPr wrap="none" lIns="0" rIns="0" tIns="0" bIns="0">
+            <a:noAutofit/>
+          </a:bodyPr>
+          <a:lstStyle/>
+          <a:p>
+            <a:pPr algn="ctr">
+              <a:lnSpc>
+                <a:spcPts val="1188"/>
+              </a:lnSpc>
+              <a:spcBef>
+                <a:spcPts val="0"/>
+              </a:spcBef>
+              <a:spcAft>
+                <a:spcPts val="0"/>
+              </a:spcAft>
+            </a:pPr>
+            <a:r>
+              <a:rPr sz="1080" b="0" i="0">
+                <a:solidFill>
+                  <a:srgbClr val="6C7680"/>
+                </a:solidFill>
+                <a:latin typeface="Arial"/>
+              </a:rPr>
+              <a:t>targets</a:t>
+            </a:r>
+          </a:p>
+        </p:txBody>
+      </p:sp>
+      <p:sp>
+        <p:nvSpPr>
+          <p:cNvPr id="18" name="Diamond 17"/>
+          <p:cNvSpPr/>
+          <p:nvPr/>
+        </p:nvSpPr>
+        <p:spPr>
+          <a:xfrm>
+            <a:off x="2692400" y="2628900"/>
+            <a:ext cx="1435100" cy="800100"/>
+          </a:xfrm>
+          <a:prstGeom prst="diamond">
+            <a:avLst/>
+          </a:prstGeom>
+          <a:solidFill>
+            <a:srgbClr val="FFFFFF"/>
+          </a:solidFill>
+          <a:ln w="12700">
+            <a:solidFill>
+              <a:srgbClr val="243343"/>
+            </a:solidFill>
+          </a:ln>
+        </p:spPr>
+        <p:style>
+          <a:lnRef idx="1">
+            <a:schemeClr val="accent1"/>
+          </a:lnRef>
+          <a:fillRef idx="3">
+            <a:schemeClr val="accent1"/>
+          </a:fillRef>
+          <a:effectRef idx="2">
+            <a:schemeClr val="accent1"/>
+          </a:effectRef>
+          <a:fontRef idx="minor">
+            <a:schemeClr val="lt1"/>
+          </a:fontRef>
+        </p:style>
+        <p:txBody>
+          <a:bodyPr rtlCol="0" anchor="ctr"/>
+          <a:lstStyle/>
+          <a:p>
+            <a:pPr algn="ctr"/>
+          </a:p>
+        </p:txBody>
+      </p:sp>
+      <p:sp>
+        <p:nvSpPr>
+          <p:cNvPr id="19" name="TextBox 18"/>
+          <p:cNvSpPr txBox="1"/>
+          <p:nvPr/>
+        </p:nvSpPr>
+        <p:spPr>
+          <a:xfrm>
+            <a:off x="2933700" y="2870200"/>
+            <a:ext cx="952500" cy="355600"/>
+          </a:xfrm>
+          <a:prstGeom prst="rect">
+            <a:avLst/>
+          </a:prstGeom>
+          <a:noFill/>
+        </p:spPr>
+        <p:txBody>
+          <a:bodyPr wrap="none" lIns="0" rIns="0" tIns="0" bIns="0">
+            <a:noAutofit/>
+          </a:bodyPr>
+          <a:lstStyle/>
+          <a:p>
+            <a:pPr algn="ctr">
+              <a:lnSpc>
+                <a:spcPts val="1210"/>
+              </a:lnSpc>
+              <a:spcBef>
+                <a:spcPts val="0"/>
+              </a:spcBef>
+              <a:spcAft>
+                <a:spcPts val="0"/>
+              </a:spcAft>
+            </a:pPr>
+            <a:r>
+              <a:rPr sz="1100" b="0" i="0">
+                <a:solidFill>
+                  <a:srgbClr val="243343"/>
+                </a:solidFill>
+                <a:latin typeface="Arial"/>
+              </a:rPr>
+              <a:t>Meets</a:t>
+            </a:r>
+          </a:p>
+          <a:p>
+            <a:pPr algn="ctr">
+              <a:lnSpc>
+                <a:spcPts val="1210"/>
+              </a:lnSpc>
+              <a:spcBef>
+                <a:spcPts val="0"/>
+              </a:spcBef>
+              <a:spcAft>
+                <a:spcPts val="0"/>
+              </a:spcAft>
+            </a:pPr>
+            <a:r>
+              <a:rPr sz="1100" b="0" i="0">
+                <a:solidFill>
+                  <a:srgbClr val="243343"/>
+                </a:solidFill>
+                <a:latin typeface="Arial"/>
+              </a:rPr>
+              <a:t>targets?</a:t>
+            </a:r>
+          </a:p>
+        </p:txBody>
+      </p:sp>
+      <p:cxnSp>
+        <p:nvCxnSpPr>
+          <p:cNvPr id="20" name="Connector 19"/>
+          <p:cNvCxnSpPr/>
+          <p:nvPr/>
+        </p:nvCxnSpPr>
+        <p:spPr>
+          <a:xfrm>
+            <a:off x="3409950" y="2184400"/>
+            <a:ext cx="0" cy="444500"/>
+          </a:xfrm>
+          <a:prstGeom prst="line">
+            <a:avLst/>
+          </a:prstGeom>
+          <a:ln w="12700">
+            <a:solidFill>
+              <a:srgbClr val="243343"/>
+            </a:solidFill>
+            <a:tailEnd type="triangle" w="sm" len="sm"/>
+          </a:ln>
+        </p:spPr>
+        <p:style>
+          <a:lnRef idx="2">
+            <a:schemeClr val="accent1"/>
+          </a:lnRef>
+          <a:fillRef idx="0">
+            <a:schemeClr val="accent1"/>
+          </a:fillRef>
+          <a:effectRef idx="1">
+            <a:schemeClr val="accent1"/>
+          </a:effectRef>
+          <a:fontRef idx="minor">
+            <a:schemeClr val="tx1"/>
+          </a:fontRef>
+        </p:style>
+      </p:cxnSp>
+      <p:sp>
+        <p:nvSpPr>
+          <p:cNvPr id="21" name="TextBox 20"/>
+          <p:cNvSpPr txBox="1"/>
+          <p:nvPr/>
+        </p:nvSpPr>
+        <p:spPr>
+          <a:xfrm>
+            <a:off x="3568700" y="2273300"/>
+            <a:ext cx="2082800" cy="215900"/>
+          </a:xfrm>
+          <a:prstGeom prst="rect">
+            <a:avLst/>
+          </a:prstGeom>
+          <a:noFill/>
+        </p:spPr>
+        <p:txBody>
+          <a:bodyPr wrap="none" lIns="0" rIns="0" tIns="0" bIns="0">
+            <a:noAutofit/>
+          </a:bodyPr>
+          <a:lstStyle/>
+          <a:p>
+            <a:pPr algn="l">
+              <a:lnSpc>
+                <a:spcPts val="1188"/>
+              </a:lnSpc>
+              <a:spcBef>
+                <a:spcPts val="0"/>
+              </a:spcBef>
+              <a:spcAft>
+                <a:spcPts val="0"/>
+              </a:spcAft>
+            </a:pPr>
+            <a:r>
+              <a:rPr sz="1080" b="0" i="0">
+                <a:solidFill>
+                  <a:srgbClr val="243343"/>
+                </a:solidFill>
+                <a:latin typeface="Arial"/>
+              </a:rPr>
+              <a:t>Predicted torque and motion</a:t>
+            </a:r>
+          </a:p>
+        </p:txBody>
+      </p:sp>
+      <p:sp>
+        <p:nvSpPr>
+          <p:cNvPr id="22" name="Rectangle 21"/>
+          <p:cNvSpPr/>
+          <p:nvPr/>
+        </p:nvSpPr>
+        <p:spPr>
+          <a:xfrm>
+            <a:off x="215900" y="2730500"/>
+            <a:ext cx="1841500" cy="635000"/>
+          </a:xfrm>
+          <a:prstGeom prst="rect">
+            <a:avLst/>
+          </a:prstGeom>
+          <a:solidFill>
+            <a:srgbClr val="F1F5F8"/>
+          </a:solidFill>
+          <a:ln w="12700">
+            <a:solidFill>
+              <a:srgbClr val="243343"/>
+            </a:solidFill>
+          </a:ln>
+        </p:spPr>
+        <p:style>
+          <a:lnRef idx="1">
+            <a:schemeClr val="accent1"/>
+          </a:lnRef>
+          <a:fillRef idx="3">
+            <a:schemeClr val="accent1"/>
+          </a:fillRef>
+          <a:effectRef idx="2">
+            <a:schemeClr val="accent1"/>
+          </a:effectRef>
+          <a:fontRef idx="minor">
+            <a:schemeClr val="lt1"/>
+          </a:fontRef>
+        </p:style>
+        <p:txBody>
+          <a:bodyPr rtlCol="0" anchor="ctr"/>
+          <a:lstStyle/>
+          <a:p>
+            <a:pPr algn="ctr"/>
+          </a:p>
+        </p:txBody>
+      </p:sp>
+      <p:sp>
+        <p:nvSpPr>
+          <p:cNvPr id="23" name="TextBox 22"/>
+          <p:cNvSpPr txBox="1"/>
+          <p:nvPr/>
+        </p:nvSpPr>
+        <p:spPr>
+          <a:xfrm>
+            <a:off x="304800" y="2792095"/>
+            <a:ext cx="1663700" cy="160654"/>
+          </a:xfrm>
+          <a:prstGeom prst="rect">
+            <a:avLst/>
+          </a:prstGeom>
+          <a:noFill/>
+        </p:spPr>
+        <p:txBody>
+          <a:bodyPr wrap="none" lIns="0" rIns="0" tIns="0" bIns="0">
+            <a:noAutofit/>
+          </a:bodyPr>
+          <a:lstStyle/>
+          <a:p>
+            <a:pPr algn="ctr">
+              <a:lnSpc>
+                <a:spcPts val="1210"/>
+              </a:lnSpc>
+              <a:spcBef>
+                <a:spcPts val="0"/>
+              </a:spcBef>
+              <a:spcAft>
+                <a:spcPts val="0"/>
+              </a:spcAft>
+            </a:pPr>
+            <a:r>
+              <a:rPr sz="1100" b="1" i="0">
+                <a:solidFill>
+                  <a:srgbClr val="243343"/>
+                </a:solidFill>
+                <a:latin typeface="Arial"/>
+              </a:rPr>
+              <a:t>Refine design</a:t>
+            </a:r>
+          </a:p>
+        </p:txBody>
+      </p:sp>
+      <p:sp>
+        <p:nvSpPr>
+          <p:cNvPr id="24" name="TextBox 23"/>
+          <p:cNvSpPr txBox="1"/>
+          <p:nvPr/>
+        </p:nvSpPr>
+        <p:spPr>
+          <a:xfrm>
+            <a:off x="304800" y="3009265"/>
+            <a:ext cx="1663700" cy="324104"/>
+          </a:xfrm>
+          <a:prstGeom prst="rect">
+            <a:avLst/>
+          </a:prstGeom>
+          <a:noFill/>
+        </p:spPr>
+        <p:txBody>
+          <a:bodyPr wrap="none" lIns="0" rIns="0" tIns="0" bIns="0">
+            <a:noAutofit/>
+          </a:bodyPr>
+          <a:lstStyle/>
+          <a:p>
+            <a:pPr algn="ctr">
+              <a:lnSpc>
+                <a:spcPts val="1210"/>
+              </a:lnSpc>
+              <a:spcBef>
+                <a:spcPts val="0"/>
+              </a:spcBef>
+              <a:spcAft>
+                <a:spcPts val="0"/>
+              </a:spcAft>
+            </a:pPr>
+            <a:r>
+              <a:rPr sz="1100" b="0" i="0">
+                <a:solidFill>
+                  <a:srgbClr val="243343"/>
+                </a:solidFill>
+                <a:latin typeface="Arial"/>
+              </a:rPr>
+              <a:t>Redesign routes or</a:t>
+            </a:r>
+          </a:p>
+          <a:p>
+            <a:pPr algn="ctr">
+              <a:lnSpc>
+                <a:spcPts val="1210"/>
+              </a:lnSpc>
+              <a:spcBef>
+                <a:spcPts val="0"/>
+              </a:spcBef>
+              <a:spcAft>
+                <a:spcPts val="0"/>
+              </a:spcAft>
+            </a:pPr>
+            <a:r>
+              <a:rPr sz="1100" b="0" i="0">
+                <a:solidFill>
+                  <a:srgbClr val="243343"/>
+                </a:solidFill>
+                <a:latin typeface="Arial"/>
+              </a:rPr>
+              <a:t>reselect actuators</a:t>
+            </a:r>
+          </a:p>
+        </p:txBody>
+      </p:sp>
+      <p:cxnSp>
+        <p:nvCxnSpPr>
+          <p:cNvPr id="25" name="Connector 24"/>
+          <p:cNvCxnSpPr/>
+          <p:nvPr/>
+        </p:nvCxnSpPr>
+        <p:spPr>
+          <a:xfrm flipH="1">
+            <a:off x="2057400" y="3028950"/>
+            <a:ext cx="635000" cy="0"/>
+          </a:xfrm>
+          <a:prstGeom prst="line">
+            <a:avLst/>
+          </a:prstGeom>
+          <a:ln w="12700">
+            <a:solidFill>
+              <a:srgbClr val="243343"/>
+            </a:solidFill>
+            <a:tailEnd type="triangle" w="sm" len="sm"/>
+          </a:ln>
+        </p:spPr>
+        <p:style>
+          <a:lnRef idx="2">
+            <a:schemeClr val="accent1"/>
+          </a:lnRef>
+          <a:fillRef idx="0">
+            <a:schemeClr val="accent1"/>
+          </a:fillRef>
+          <a:effectRef idx="1">
+            <a:schemeClr val="accent1"/>
+          </a:effectRef>
+          <a:fontRef idx="minor">
+            <a:schemeClr val="tx1"/>
+          </a:fontRef>
+        </p:style>
+      </p:cxnSp>
+      <p:sp>
+        <p:nvSpPr>
+          <p:cNvPr id="26" name="TextBox 25"/>
+          <p:cNvSpPr txBox="1"/>
+          <p:nvPr/>
+        </p:nvSpPr>
+        <p:spPr>
+          <a:xfrm>
+            <a:off x="2108200" y="2717800"/>
+            <a:ext cx="508000" cy="355600"/>
+          </a:xfrm>
+          <a:prstGeom prst="rect">
+            <a:avLst/>
+          </a:prstGeom>
+          <a:noFill/>
+        </p:spPr>
+        <p:txBody>
+          <a:bodyPr wrap="none" lIns="0" rIns="0" tIns="0" bIns="0">
+            <a:noAutofit/>
+          </a:bodyPr>
+          <a:lstStyle/>
+          <a:p>
+            <a:pPr algn="ctr">
+              <a:lnSpc>
+                <a:spcPts val="1188"/>
+              </a:lnSpc>
+              <a:spcBef>
+                <a:spcPts val="0"/>
+              </a:spcBef>
+              <a:spcAft>
+                <a:spcPts val="0"/>
+              </a:spcAft>
+            </a:pPr>
+            <a:r>
+              <a:rPr sz="1080" b="0" i="0">
+                <a:solidFill>
+                  <a:srgbClr val="6C7680"/>
+                </a:solidFill>
+                <a:latin typeface="Arial"/>
+              </a:rPr>
+              <a:t>no</a:t>
+            </a:r>
+          </a:p>
+        </p:txBody>
+      </p:sp>
+      <p:cxnSp>
+        <p:nvCxnSpPr>
+          <p:cNvPr id="27" name="Connector 26"/>
+          <p:cNvCxnSpPr/>
+          <p:nvPr/>
+        </p:nvCxnSpPr>
+        <p:spPr>
+          <a:xfrm flipV="1">
+            <a:off x="1136650" y="2349500"/>
+            <a:ext cx="0" cy="381000"/>
+          </a:xfrm>
+          <a:prstGeom prst="line">
+            <a:avLst/>
+          </a:prstGeom>
+          <a:ln w="12700">
+            <a:solidFill>
+              <a:srgbClr val="243343"/>
             </a:solidFill>
           </a:ln>
         </p:spPr>
@@ -4063,21 +4337,21 @@
       </p:cxnSp>
       <p:cxnSp>
         <p:nvCxnSpPr>
-          <p:cNvPr id="22" name="Connector 21"/>
+          <p:cNvPr id="28" name="Connector 27"/>
           <p:cNvCxnSpPr/>
           <p:nvPr/>
         </p:nvCxnSpPr>
         <p:spPr>
-          <a:xfrm flipV="1">
-            <a:off x="2394000" y="1980000"/>
-            <a:ext cx="0" cy="43200"/>
+          <a:xfrm>
+            <a:off x="1136650" y="2349500"/>
+            <a:ext cx="1123950" cy="0"/>
           </a:xfrm>
           <a:prstGeom prst="line">
             <a:avLst/>
           </a:prstGeom>
           <a:ln w="12700">
             <a:solidFill>
-              <a:srgbClr val="1F1F1F"/>
+              <a:srgbClr val="243343"/>
             </a:solidFill>
           </a:ln>
         </p:spPr>
@@ -4098,92 +4372,21 @@
       </p:cxnSp>
       <p:cxnSp>
         <p:nvCxnSpPr>
-          <p:cNvPr id="23" name="Connector 22"/>
+          <p:cNvPr id="29" name="Connector 28"/>
           <p:cNvCxnSpPr/>
           <p:nvPr/>
         </p:nvCxnSpPr>
         <p:spPr>
           <a:xfrm flipV="1">
-            <a:off x="2394000" y="1980000"/>
-            <a:ext cx="0" cy="306000"/>
+            <a:off x="2260600" y="1866900"/>
+            <a:ext cx="0" cy="482600"/>
           </a:xfrm>
           <a:prstGeom prst="line">
             <a:avLst/>
           </a:prstGeom>
           <a:ln w="12700">
             <a:solidFill>
-              <a:srgbClr val="1F1F1F"/>
-            </a:solidFill>
-            <a:tailEnd type="triangle" w="med" len="med"/>
-          </a:ln>
-        </p:spPr>
-        <p:style>
-          <a:lnRef idx="2">
-            <a:schemeClr val="accent1"/>
-          </a:lnRef>
-          <a:fillRef idx="0">
-            <a:schemeClr val="accent1"/>
-          </a:fillRef>
-          <a:effectRef idx="1">
-            <a:schemeClr val="accent1"/>
-          </a:effectRef>
-          <a:fontRef idx="minor">
-            <a:schemeClr val="tx1"/>
-          </a:fontRef>
-        </p:style>
-      </p:cxnSp>
-      <p:sp>
-        <p:nvSpPr>
-          <p:cNvPr id="24" name="TextBox 23"/>
-          <p:cNvSpPr txBox="1"/>
-          <p:nvPr/>
-        </p:nvSpPr>
-        <p:spPr>
-          <a:xfrm>
-            <a:off x="2484000" y="2070000"/>
-            <a:ext cx="2736000" cy="270000"/>
-          </a:xfrm>
-          <a:prstGeom prst="rect">
-            <a:avLst/>
-          </a:prstGeom>
-          <a:noFill/>
-        </p:spPr>
-        <p:txBody>
-          <a:bodyPr wrap="square" lIns="10800" rIns="10800" tIns="3600" bIns="3600">
-            <a:spAutoFit/>
-          </a:bodyPr>
-          <a:lstStyle/>
-          <a:p>
-            <a:pPr algn="l"/>
-            <a:r>
-              <a:rPr sz="1000" b="0">
-                <a:solidFill>
-                  <a:srgbClr val="1F1F1F"/>
-                </a:solidFill>
-                <a:latin typeface="Arial"/>
-              </a:rPr>
-              <a:t>no: redesign routes or reselect actuators</a:t>
-            </a:r>
-          </a:p>
-        </p:txBody>
-      </p:sp>
-      <p:cxnSp>
-        <p:nvCxnSpPr>
-          <p:cNvPr id="25" name="Connector 24"/>
-          <p:cNvCxnSpPr/>
-          <p:nvPr/>
-        </p:nvCxnSpPr>
-        <p:spPr>
-          <a:xfrm>
-            <a:off x="5292000" y="1872000"/>
-            <a:ext cx="0" cy="234000"/>
-          </a:xfrm>
-          <a:prstGeom prst="line">
-            <a:avLst/>
-          </a:prstGeom>
-          <a:ln w="12700">
-            <a:solidFill>
-              <a:srgbClr val="1F1F1F"/>
+              <a:srgbClr val="243343"/>
             </a:solidFill>
           </a:ln>
         </p:spPr>
@@ -4204,23 +4407,401 @@
       </p:cxnSp>
       <p:cxnSp>
         <p:nvCxnSpPr>
-          <p:cNvPr id="26" name="Connector 25"/>
+          <p:cNvPr id="30" name="Connector 29"/>
           <p:cNvCxnSpPr/>
           <p:nvPr/>
         </p:nvCxnSpPr>
         <p:spPr>
-          <a:xfrm flipH="1">
-            <a:off x="5094000" y="2106000"/>
-            <a:ext cx="198000" cy="10800"/>
+          <a:xfrm flipV="1">
+            <a:off x="2260600" y="508000"/>
+            <a:ext cx="0" cy="1155700"/>
           </a:xfrm>
           <a:prstGeom prst="line">
             <a:avLst/>
           </a:prstGeom>
           <a:ln w="12700">
             <a:solidFill>
-              <a:srgbClr val="1F1F1F"/>
+              <a:srgbClr val="243343"/>
             </a:solidFill>
-            <a:tailEnd type="triangle" w="med" len="med"/>
+          </a:ln>
+        </p:spPr>
+        <p:style>
+          <a:lnRef idx="2">
+            <a:schemeClr val="accent1"/>
+          </a:lnRef>
+          <a:fillRef idx="0">
+            <a:schemeClr val="accent1"/>
+          </a:fillRef>
+          <a:effectRef idx="1">
+            <a:schemeClr val="accent1"/>
+          </a:effectRef>
+          <a:fontRef idx="minor">
+            <a:schemeClr val="tx1"/>
+          </a:fontRef>
+        </p:style>
+      </p:cxnSp>
+      <p:cxnSp>
+        <p:nvCxnSpPr>
+          <p:cNvPr id="31" name="Connector 30"/>
+          <p:cNvCxnSpPr/>
+          <p:nvPr/>
+        </p:nvCxnSpPr>
+        <p:spPr>
+          <a:xfrm>
+            <a:off x="2260600" y="508000"/>
+            <a:ext cx="228600" cy="0"/>
+          </a:xfrm>
+          <a:prstGeom prst="line">
+            <a:avLst/>
+          </a:prstGeom>
+          <a:ln w="12700">
+            <a:solidFill>
+              <a:srgbClr val="243343"/>
+            </a:solidFill>
+            <a:tailEnd type="triangle" w="sm" len="sm"/>
+          </a:ln>
+        </p:spPr>
+        <p:style>
+          <a:lnRef idx="2">
+            <a:schemeClr val="accent1"/>
+          </a:lnRef>
+          <a:fillRef idx="0">
+            <a:schemeClr val="accent1"/>
+          </a:fillRef>
+          <a:effectRef idx="1">
+            <a:schemeClr val="accent1"/>
+          </a:effectRef>
+          <a:fontRef idx="minor">
+            <a:schemeClr val="tx1"/>
+          </a:fontRef>
+        </p:style>
+      </p:cxnSp>
+      <p:sp>
+        <p:nvSpPr>
+          <p:cNvPr id="32" name="Rectangle 31"/>
+          <p:cNvSpPr/>
+          <p:nvPr/>
+        </p:nvSpPr>
+        <p:spPr>
+          <a:xfrm>
+            <a:off x="4508500" y="2717800"/>
+            <a:ext cx="1282700" cy="698500"/>
+          </a:xfrm>
+          <a:prstGeom prst="rect">
+            <a:avLst/>
+          </a:prstGeom>
+          <a:solidFill>
+            <a:srgbClr val="F1F5F8"/>
+          </a:solidFill>
+          <a:ln w="12700">
+            <a:solidFill>
+              <a:srgbClr val="243343"/>
+            </a:solidFill>
+            <a:prstDash val="dash"/>
+          </a:ln>
+        </p:spPr>
+        <p:style>
+          <a:lnRef idx="1">
+            <a:schemeClr val="accent1"/>
+          </a:lnRef>
+          <a:fillRef idx="3">
+            <a:schemeClr val="accent1"/>
+          </a:fillRef>
+          <a:effectRef idx="2">
+            <a:schemeClr val="accent1"/>
+          </a:effectRef>
+          <a:fontRef idx="minor">
+            <a:schemeClr val="lt1"/>
+          </a:fontRef>
+        </p:style>
+        <p:txBody>
+          <a:bodyPr rtlCol="0" anchor="ctr"/>
+          <a:lstStyle/>
+          <a:p>
+            <a:pPr algn="ctr"/>
+          </a:p>
+        </p:txBody>
+      </p:sp>
+      <p:sp>
+        <p:nvSpPr>
+          <p:cNvPr id="33" name="TextBox 32"/>
+          <p:cNvSpPr txBox="1"/>
+          <p:nvPr/>
+        </p:nvSpPr>
+        <p:spPr>
+          <a:xfrm>
+            <a:off x="4597400" y="2840736"/>
+            <a:ext cx="1104900" cy="596900"/>
+          </a:xfrm>
+          <a:prstGeom prst="rect">
+            <a:avLst/>
+          </a:prstGeom>
+          <a:noFill/>
+        </p:spPr>
+        <p:txBody>
+          <a:bodyPr wrap="none" lIns="0" rIns="0" tIns="0" bIns="0">
+            <a:noAutofit/>
+          </a:bodyPr>
+          <a:lstStyle/>
+          <a:p>
+            <a:pPr algn="ctr">
+              <a:lnSpc>
+                <a:spcPts val="1188"/>
+              </a:lnSpc>
+              <a:spcBef>
+                <a:spcPts val="0"/>
+              </a:spcBef>
+              <a:spcAft>
+                <a:spcPts val="0"/>
+              </a:spcAft>
+            </a:pPr>
+            <a:r>
+              <a:rPr sz="1080" b="0" i="0">
+                <a:solidFill>
+                  <a:srgbClr val="243343"/>
+                </a:solidFill>
+                <a:latin typeface="Arial"/>
+              </a:rPr>
+              <a:t>Closed-loop</a:t>
+            </a:r>
+          </a:p>
+          <a:p>
+            <a:pPr algn="ctr">
+              <a:lnSpc>
+                <a:spcPts val="1188"/>
+              </a:lnSpc>
+              <a:spcBef>
+                <a:spcPts val="0"/>
+              </a:spcBef>
+              <a:spcAft>
+                <a:spcPts val="0"/>
+              </a:spcAft>
+            </a:pPr>
+            <a:r>
+              <a:rPr sz="1080" b="0" i="0">
+                <a:solidFill>
+                  <a:srgbClr val="243343"/>
+                </a:solidFill>
+                <a:latin typeface="Arial"/>
+              </a:rPr>
+              <a:t>verification</a:t>
+            </a:r>
+          </a:p>
+          <a:p>
+            <a:pPr algn="ctr">
+              <a:lnSpc>
+                <a:spcPts val="1188"/>
+              </a:lnSpc>
+              <a:spcBef>
+                <a:spcPts val="0"/>
+              </a:spcBef>
+              <a:spcAft>
+                <a:spcPts val="0"/>
+              </a:spcAft>
+            </a:pPr>
+            <a:r>
+              <a:rPr sz="1080" b="0" i="0">
+                <a:solidFill>
+                  <a:srgbClr val="243343"/>
+                </a:solidFill>
+                <a:latin typeface="Arial"/>
+              </a:rPr>
+              <a:t>(Ch. 6)</a:t>
+            </a:r>
+          </a:p>
+        </p:txBody>
+      </p:sp>
+      <p:cxnSp>
+        <p:nvCxnSpPr>
+          <p:cNvPr id="34" name="Connector 33"/>
+          <p:cNvCxnSpPr/>
+          <p:nvPr/>
+        </p:nvCxnSpPr>
+        <p:spPr>
+          <a:xfrm>
+            <a:off x="4127500" y="3028950"/>
+            <a:ext cx="381000" cy="0"/>
+          </a:xfrm>
+          <a:prstGeom prst="line">
+            <a:avLst/>
+          </a:prstGeom>
+          <a:ln w="12700">
+            <a:solidFill>
+              <a:srgbClr val="243343"/>
+            </a:solidFill>
+            <a:tailEnd type="triangle" w="sm" len="sm"/>
+          </a:ln>
+        </p:spPr>
+        <p:style>
+          <a:lnRef idx="2">
+            <a:schemeClr val="accent1"/>
+          </a:lnRef>
+          <a:fillRef idx="0">
+            <a:schemeClr val="accent1"/>
+          </a:fillRef>
+          <a:effectRef idx="1">
+            <a:schemeClr val="accent1"/>
+          </a:effectRef>
+          <a:fontRef idx="minor">
+            <a:schemeClr val="tx1"/>
+          </a:fontRef>
+        </p:style>
+      </p:cxnSp>
+      <p:sp>
+        <p:nvSpPr>
+          <p:cNvPr id="35" name="TextBox 34"/>
+          <p:cNvSpPr txBox="1"/>
+          <p:nvPr/>
+        </p:nvSpPr>
+        <p:spPr>
+          <a:xfrm>
+            <a:off x="4089400" y="2717800"/>
+            <a:ext cx="431800" cy="355600"/>
+          </a:xfrm>
+          <a:prstGeom prst="rect">
+            <a:avLst/>
+          </a:prstGeom>
+          <a:noFill/>
+        </p:spPr>
+        <p:txBody>
+          <a:bodyPr wrap="none" lIns="0" rIns="0" tIns="0" bIns="0">
+            <a:noAutofit/>
+          </a:bodyPr>
+          <a:lstStyle/>
+          <a:p>
+            <a:pPr algn="ctr">
+              <a:lnSpc>
+                <a:spcPts val="1188"/>
+              </a:lnSpc>
+              <a:spcBef>
+                <a:spcPts val="0"/>
+              </a:spcBef>
+              <a:spcAft>
+                <a:spcPts val="0"/>
+              </a:spcAft>
+            </a:pPr>
+            <a:r>
+              <a:rPr sz="1080" b="0" i="0">
+                <a:solidFill>
+                  <a:srgbClr val="6C7680"/>
+                </a:solidFill>
+                <a:latin typeface="Arial"/>
+              </a:rPr>
+              <a:t>yes</a:t>
+            </a:r>
+          </a:p>
+        </p:txBody>
+      </p:sp>
+      <p:sp>
+        <p:nvSpPr>
+          <p:cNvPr id="36" name="Rectangle 35"/>
+          <p:cNvSpPr/>
+          <p:nvPr/>
+        </p:nvSpPr>
+        <p:spPr>
+          <a:xfrm>
+            <a:off x="4343400" y="3695700"/>
+            <a:ext cx="1447800" cy="355600"/>
+          </a:xfrm>
+          <a:prstGeom prst="rect">
+            <a:avLst/>
+          </a:prstGeom>
+          <a:solidFill>
+            <a:srgbClr val="F1F5F8"/>
+          </a:solidFill>
+          <a:ln w="12700">
+            <a:solidFill>
+              <a:srgbClr val="243343"/>
+            </a:solidFill>
+            <a:prstDash val="dash"/>
+          </a:ln>
+        </p:spPr>
+        <p:style>
+          <a:lnRef idx="1">
+            <a:schemeClr val="accent1"/>
+          </a:lnRef>
+          <a:fillRef idx="3">
+            <a:schemeClr val="accent1"/>
+          </a:fillRef>
+          <a:effectRef idx="2">
+            <a:schemeClr val="accent1"/>
+          </a:effectRef>
+          <a:fontRef idx="minor">
+            <a:schemeClr val="lt1"/>
+          </a:fontRef>
+        </p:style>
+        <p:txBody>
+          <a:bodyPr rtlCol="0" anchor="ctr"/>
+          <a:lstStyle/>
+          <a:p>
+            <a:pPr algn="ctr"/>
+          </a:p>
+        </p:txBody>
+      </p:sp>
+      <p:sp>
+        <p:nvSpPr>
+          <p:cNvPr id="37" name="TextBox 36"/>
+          <p:cNvSpPr txBox="1"/>
+          <p:nvPr/>
+        </p:nvSpPr>
+        <p:spPr>
+          <a:xfrm>
+            <a:off x="4432300" y="3798062"/>
+            <a:ext cx="1270000" cy="254000"/>
+          </a:xfrm>
+          <a:prstGeom prst="rect">
+            <a:avLst/>
+          </a:prstGeom>
+          <a:noFill/>
+        </p:spPr>
+        <p:txBody>
+          <a:bodyPr wrap="none" lIns="0" rIns="0" tIns="0" bIns="0">
+            <a:noAutofit/>
+          </a:bodyPr>
+          <a:lstStyle/>
+          <a:p>
+            <a:pPr algn="ctr">
+              <a:lnSpc>
+                <a:spcPts val="1188"/>
+              </a:lnSpc>
+              <a:spcBef>
+                <a:spcPts val="0"/>
+              </a:spcBef>
+              <a:spcAft>
+                <a:spcPts val="0"/>
+              </a:spcAft>
+            </a:pPr>
+            <a:r>
+              <a:rPr sz="1080" b="0" i="0">
+                <a:solidFill>
+                  <a:srgbClr val="243343"/>
+                </a:solidFill>
+                <a:latin typeface="Arial"/>
+              </a:rPr>
+              <a:t>Commit to hardware</a:t>
+            </a:r>
+          </a:p>
+        </p:txBody>
+      </p:sp>
+      <p:cxnSp>
+        <p:nvCxnSpPr>
+          <p:cNvPr id="38" name="Connector 37"/>
+          <p:cNvCxnSpPr/>
+          <p:nvPr/>
+        </p:nvCxnSpPr>
+        <p:spPr>
+          <a:xfrm>
+            <a:off x="5143500" y="3416300"/>
+            <a:ext cx="0" cy="279400"/>
+          </a:xfrm>
+          <a:prstGeom prst="line">
+            <a:avLst/>
+          </a:prstGeom>
+          <a:ln w="12700">
+            <a:solidFill>
+              <a:srgbClr val="243343"/>
+            </a:solidFill>
+            <a:tailEnd type="triangle" w="sm" len="sm"/>
           </a:ln>
         </p:spPr>
         <p:style>
